--- a/docs/regime-gated_v2_3arm_1p_2026-07-09.pptx
+++ b/docs/regime-gated_v2_3arm_1p_2026-07-09.pptx
@@ -302,7 +302,7 @@
           <a:p>
             <a:fld id="{5BCAD085-E8A6-8845-BD4E-CB4CCA059FC4}" type="datetimeFigureOut">
               <a:rPr lang="en-US" smtClean="0"/>
-              <a:t>7/9/26</a:t>
+              <a:t>7/10/26</a:t>
             </a:fld>
             <a:endParaRPr lang="en-US"/>
           </a:p>
@@ -470,7 +470,7 @@
           <a:p>
             <a:fld id="{5BCAD085-E8A6-8845-BD4E-CB4CCA059FC4}" type="datetimeFigureOut">
               <a:rPr lang="en-US" smtClean="0"/>
-              <a:t>7/9/26</a:t>
+              <a:t>7/10/26</a:t>
             </a:fld>
             <a:endParaRPr lang="en-US"/>
           </a:p>
@@ -648,7 +648,7 @@
           <a:p>
             <a:fld id="{5BCAD085-E8A6-8845-BD4E-CB4CCA059FC4}" type="datetimeFigureOut">
               <a:rPr lang="en-US" smtClean="0"/>
-              <a:t>7/9/26</a:t>
+              <a:t>7/10/26</a:t>
             </a:fld>
             <a:endParaRPr lang="en-US"/>
           </a:p>
@@ -816,7 +816,7 @@
           <a:p>
             <a:fld id="{5BCAD085-E8A6-8845-BD4E-CB4CCA059FC4}" type="datetimeFigureOut">
               <a:rPr lang="en-US" smtClean="0"/>
-              <a:t>7/9/26</a:t>
+              <a:t>7/10/26</a:t>
             </a:fld>
             <a:endParaRPr lang="en-US"/>
           </a:p>
@@ -1061,7 +1061,7 @@
           <a:p>
             <a:fld id="{5BCAD085-E8A6-8845-BD4E-CB4CCA059FC4}" type="datetimeFigureOut">
               <a:rPr lang="en-US" smtClean="0"/>
-              <a:t>7/9/26</a:t>
+              <a:t>7/10/26</a:t>
             </a:fld>
             <a:endParaRPr lang="en-US"/>
           </a:p>
@@ -1346,7 +1346,7 @@
           <a:p>
             <a:fld id="{5BCAD085-E8A6-8845-BD4E-CB4CCA059FC4}" type="datetimeFigureOut">
               <a:rPr lang="en-US" smtClean="0"/>
-              <a:t>7/9/26</a:t>
+              <a:t>7/10/26</a:t>
             </a:fld>
             <a:endParaRPr lang="en-US"/>
           </a:p>
@@ -1765,7 +1765,7 @@
           <a:p>
             <a:fld id="{5BCAD085-E8A6-8845-BD4E-CB4CCA059FC4}" type="datetimeFigureOut">
               <a:rPr lang="en-US" smtClean="0"/>
-              <a:t>7/9/26</a:t>
+              <a:t>7/10/26</a:t>
             </a:fld>
             <a:endParaRPr lang="en-US"/>
           </a:p>
@@ -1882,7 +1882,7 @@
           <a:p>
             <a:fld id="{5BCAD085-E8A6-8845-BD4E-CB4CCA059FC4}" type="datetimeFigureOut">
               <a:rPr lang="en-US" smtClean="0"/>
-              <a:t>7/9/26</a:t>
+              <a:t>7/10/26</a:t>
             </a:fld>
             <a:endParaRPr lang="en-US"/>
           </a:p>
@@ -1977,7 +1977,7 @@
           <a:p>
             <a:fld id="{5BCAD085-E8A6-8845-BD4E-CB4CCA059FC4}" type="datetimeFigureOut">
               <a:rPr lang="en-US" smtClean="0"/>
-              <a:t>7/9/26</a:t>
+              <a:t>7/10/26</a:t>
             </a:fld>
             <a:endParaRPr lang="en-US"/>
           </a:p>
@@ -2252,7 +2252,7 @@
           <a:p>
             <a:fld id="{5BCAD085-E8A6-8845-BD4E-CB4CCA059FC4}" type="datetimeFigureOut">
               <a:rPr lang="en-US" smtClean="0"/>
-              <a:t>7/9/26</a:t>
+              <a:t>7/10/26</a:t>
             </a:fld>
             <a:endParaRPr lang="en-US"/>
           </a:p>
@@ -2504,7 +2504,7 @@
           <a:p>
             <a:fld id="{5BCAD085-E8A6-8845-BD4E-CB4CCA059FC4}" type="datetimeFigureOut">
               <a:rPr lang="en-US" smtClean="0"/>
-              <a:t>7/9/26</a:t>
+              <a:t>7/10/26</a:t>
             </a:fld>
             <a:endParaRPr lang="en-US"/>
           </a:p>
@@ -2715,7 +2715,7 @@
           <a:p>
             <a:fld id="{5BCAD085-E8A6-8845-BD4E-CB4CCA059FC4}" type="datetimeFigureOut">
               <a:rPr lang="en-US" smtClean="0"/>
-              <a:t>7/9/26</a:t>
+              <a:t>7/10/26</a:t>
             </a:fld>
             <a:endParaRPr lang="en-US"/>
           </a:p>
@@ -4008,14 +4008,34 @@
               </a:spcAft>
             </a:pPr>
             <a:r>
-              <a:rPr sz="1150" b="1">
+              <a:rPr sz="1150" b="1" dirty="0">
                 <a:solidFill>
                   <a:srgbClr val="1F3B5C"/>
                 </a:solidFill>
                 <a:latin typeface="NanumSquare Neo Regular" pitchFamily="2" charset="-127"/>
                 <a:ea typeface="NanumSquare Neo Regular" pitchFamily="2" charset="-127"/>
               </a:rPr>
-              <a:t>2) SHOCK (충격)?</a:t>
+              <a:t>2) SHOCK (</a:t>
+            </a:r>
+            <a:r>
+              <a:rPr sz="1150" b="1" dirty="0" err="1">
+                <a:solidFill>
+                  <a:srgbClr val="1F3B5C"/>
+                </a:solidFill>
+                <a:latin typeface="NanumSquare Neo Regular" pitchFamily="2" charset="-127"/>
+                <a:ea typeface="NanumSquare Neo Regular" pitchFamily="2" charset="-127"/>
+              </a:rPr>
+              <a:t>충격</a:t>
+            </a:r>
+            <a:r>
+              <a:rPr sz="1150" b="1" dirty="0">
+                <a:solidFill>
+                  <a:srgbClr val="1F3B5C"/>
+                </a:solidFill>
+                <a:latin typeface="NanumSquare Neo Regular" pitchFamily="2" charset="-127"/>
+                <a:ea typeface="NanumSquare Neo Regular" pitchFamily="2" charset="-127"/>
+              </a:rPr>
+              <a:t>)?</a:t>
             </a:r>
           </a:p>
           <a:p>
@@ -4025,15 +4045,132 @@
               </a:spcAft>
             </a:pPr>
             <a:r>
-              <a:rPr sz="930" b="0">
+              <a:rPr sz="930" b="0" dirty="0">
                 <a:solidFill>
                   <a:srgbClr val="222222"/>
                 </a:solidFill>
                 <a:latin typeface="NanumSquare Neo Regular" pitchFamily="2" charset="-127"/>
                 <a:ea typeface="NanumSquare Neo Regular" pitchFamily="2" charset="-127"/>
               </a:rPr>
-              <a:t>vol(q) &gt; θ(q)   — 최근 4분기 출렁임이 평소 중앙값보다 큼</a:t>
-            </a:r>
+              <a:t>vol(q) &gt; </a:t>
+            </a:r>
+            <a:r>
+              <a:rPr sz="930" b="0" dirty="0" err="1">
+                <a:solidFill>
+                  <a:srgbClr val="222222"/>
+                </a:solidFill>
+                <a:latin typeface="NanumSquare Neo Regular" pitchFamily="2" charset="-127"/>
+                <a:ea typeface="NanumSquare Neo Regular" pitchFamily="2" charset="-127"/>
+              </a:rPr>
+              <a:t>θ</a:t>
+            </a:r>
+            <a:r>
+              <a:rPr sz="930" b="0" dirty="0">
+                <a:solidFill>
+                  <a:srgbClr val="222222"/>
+                </a:solidFill>
+                <a:latin typeface="NanumSquare Neo Regular" pitchFamily="2" charset="-127"/>
+                <a:ea typeface="NanumSquare Neo Regular" pitchFamily="2" charset="-127"/>
+              </a:rPr>
+              <a:t>(q)   — </a:t>
+            </a:r>
+            <a:r>
+              <a:rPr sz="930" b="0" dirty="0" err="1">
+                <a:solidFill>
+                  <a:srgbClr val="222222"/>
+                </a:solidFill>
+                <a:latin typeface="NanumSquare Neo Regular" pitchFamily="2" charset="-127"/>
+                <a:ea typeface="NanumSquare Neo Regular" pitchFamily="2" charset="-127"/>
+              </a:rPr>
+              <a:t>최근</a:t>
+            </a:r>
+            <a:r>
+              <a:rPr sz="930" b="0" dirty="0">
+                <a:solidFill>
+                  <a:srgbClr val="222222"/>
+                </a:solidFill>
+                <a:latin typeface="NanumSquare Neo Regular" pitchFamily="2" charset="-127"/>
+                <a:ea typeface="NanumSquare Neo Regular" pitchFamily="2" charset="-127"/>
+              </a:rPr>
+              <a:t> 4분기 </a:t>
+            </a:r>
+            <a:r>
+              <a:rPr sz="930" b="0" dirty="0" err="1">
+                <a:solidFill>
+                  <a:srgbClr val="222222"/>
+                </a:solidFill>
+                <a:latin typeface="NanumSquare Neo Regular" pitchFamily="2" charset="-127"/>
+                <a:ea typeface="NanumSquare Neo Regular" pitchFamily="2" charset="-127"/>
+              </a:rPr>
+              <a:t>출렁임이</a:t>
+            </a:r>
+            <a:r>
+              <a:rPr sz="930" b="0" dirty="0">
+                <a:solidFill>
+                  <a:srgbClr val="222222"/>
+                </a:solidFill>
+                <a:latin typeface="NanumSquare Neo Regular" pitchFamily="2" charset="-127"/>
+                <a:ea typeface="NanumSquare Neo Regular" pitchFamily="2" charset="-127"/>
+              </a:rPr>
+              <a:t> </a:t>
+            </a:r>
+            <a:r>
+              <a:rPr sz="930" b="0" dirty="0" err="1">
+                <a:solidFill>
+                  <a:srgbClr val="222222"/>
+                </a:solidFill>
+                <a:latin typeface="NanumSquare Neo Regular" pitchFamily="2" charset="-127"/>
+                <a:ea typeface="NanumSquare Neo Regular" pitchFamily="2" charset="-127"/>
+              </a:rPr>
+              <a:t>평소</a:t>
+            </a:r>
+            <a:r>
+              <a:rPr sz="930" b="0" dirty="0">
+                <a:solidFill>
+                  <a:srgbClr val="222222"/>
+                </a:solidFill>
+                <a:latin typeface="NanumSquare Neo Regular" pitchFamily="2" charset="-127"/>
+                <a:ea typeface="NanumSquare Neo Regular" pitchFamily="2" charset="-127"/>
+              </a:rPr>
+              <a:t> </a:t>
+            </a:r>
+            <a:r>
+              <a:rPr sz="930" b="0" dirty="0" err="1">
+                <a:solidFill>
+                  <a:srgbClr val="222222"/>
+                </a:solidFill>
+                <a:latin typeface="NanumSquare Neo Regular" pitchFamily="2" charset="-127"/>
+                <a:ea typeface="NanumSquare Neo Regular" pitchFamily="2" charset="-127"/>
+              </a:rPr>
+              <a:t>중앙값보다</a:t>
+            </a:r>
+            <a:r>
+              <a:rPr sz="930" b="0" dirty="0">
+                <a:solidFill>
+                  <a:srgbClr val="222222"/>
+                </a:solidFill>
+                <a:latin typeface="NanumSquare Neo Regular" pitchFamily="2" charset="-127"/>
+                <a:ea typeface="NanumSquare Neo Regular" pitchFamily="2" charset="-127"/>
+              </a:rPr>
+              <a:t> </a:t>
+            </a:r>
+            <a:r>
+              <a:rPr sz="930" b="0" dirty="0" err="1">
+                <a:solidFill>
+                  <a:srgbClr val="222222"/>
+                </a:solidFill>
+                <a:latin typeface="NanumSquare Neo Regular" pitchFamily="2" charset="-127"/>
+                <a:ea typeface="NanumSquare Neo Regular" pitchFamily="2" charset="-127"/>
+              </a:rPr>
+              <a:t>큼</a:t>
+            </a:r>
+            <a:endParaRPr sz="930" b="0" dirty="0">
+              <a:solidFill>
+                <a:srgbClr val="222222"/>
+              </a:solidFill>
+              <a:latin typeface="NanumSquare Neo Regular" pitchFamily="2" charset="-127"/>
+              <a:ea typeface="NanumSquare Neo Regular" pitchFamily="2" charset="-127"/>
+            </a:endParaRPr>
           </a:p>
         </p:txBody>
       </p:sp>
@@ -4692,7 +4829,13 @@
           <p:cNvGraphicFramePr>
             <a:graphicFrameLocks noGrp="1"/>
           </p:cNvGraphicFramePr>
-          <p:nvPr/>
+          <p:nvPr>
+            <p:extLst>
+              <p:ext uri="{D42A27DB-BD31-4B8C-83A1-F6EECF244321}">
+                <p14:modId xmlns:p14="http://schemas.microsoft.com/office/powerpoint/2010/main" val="3132907628"/>
+              </p:ext>
+            </p:extLst>
+          </p:nvPr>
         </p:nvGraphicFramePr>
         <p:xfrm>
           <a:off x="7077456" y="3218688"/>
@@ -4773,7 +4916,7 @@
                       </a:endParaRPr>
                     </a:p>
                   </a:txBody>
-                  <a:tcPr marL="36576" marR="36576" marT="9144" marB="9144">
+                  <a:tcPr marL="36576" marR="36576" marT="9144" marB="9144" anchor="ctr">
                     <a:solidFill>
                       <a:srgbClr val="1F3B5C"/>
                     </a:solidFill>
@@ -4797,7 +4940,7 @@
                       </a:r>
                     </a:p>
                   </a:txBody>
-                  <a:tcPr marL="36576" marR="36576" marT="9144" marB="9144">
+                  <a:tcPr marL="36576" marR="36576" marT="9144" marB="9144" anchor="ctr">
                     <a:solidFill>
                       <a:srgbClr val="1F3B5C"/>
                     </a:solidFill>
@@ -4821,7 +4964,7 @@
                       </a:r>
                     </a:p>
                   </a:txBody>
-                  <a:tcPr marL="36576" marR="36576" marT="9144" marB="9144">
+                  <a:tcPr marL="36576" marR="36576" marT="9144" marB="9144" anchor="ctr">
                     <a:solidFill>
                       <a:srgbClr val="1F3B5C"/>
                     </a:solidFill>
@@ -4872,7 +5015,7 @@
                       </a:r>
                     </a:p>
                   </a:txBody>
-                  <a:tcPr marL="36576" marR="36576" marT="9144" marB="9144">
+                  <a:tcPr marL="36576" marR="36576" marT="9144" marB="9144" anchor="ctr">
                     <a:solidFill>
                       <a:srgbClr val="F2F2F2"/>
                     </a:solidFill>
@@ -4896,7 +5039,7 @@
                       </a:r>
                     </a:p>
                   </a:txBody>
-                  <a:tcPr marL="36576" marR="36576" marT="9144" marB="9144">
+                  <a:tcPr marL="36576" marR="36576" marT="9144" marB="9144" anchor="ctr">
                     <a:solidFill>
                       <a:srgbClr val="F2F2F2"/>
                     </a:solidFill>
@@ -4920,7 +5063,7 @@
                       </a:r>
                     </a:p>
                   </a:txBody>
-                  <a:tcPr marL="36576" marR="36576" marT="9144" marB="9144">
+                  <a:tcPr marL="36576" marR="36576" marT="9144" marB="9144" anchor="ctr">
                     <a:solidFill>
                       <a:srgbClr val="F2F2F2"/>
                     </a:solidFill>
@@ -4940,18 +5083,38 @@
                     <a:p>
                       <a:pPr algn="ctr"/>
                       <a:r>
-                        <a:rPr sz="950" b="0">
+                        <a:rPr sz="950" b="0" dirty="0">
                           <a:solidFill>
                             <a:srgbClr val="222222"/>
                           </a:solidFill>
                           <a:latin typeface="NanumSquare Neo Regular" pitchFamily="2" charset="-127"/>
                           <a:ea typeface="NanumSquare Neo Regular" pitchFamily="2" charset="-127"/>
                         </a:rPr>
-                        <a:t>2-arm (v1, 7/2 보고)</a:t>
+                        <a:t>2-arm (v1, 7/2 </a:t>
+                      </a:r>
+                      <a:r>
+                        <a:rPr sz="950" b="0" dirty="0" err="1">
+                          <a:solidFill>
+                            <a:srgbClr val="222222"/>
+                          </a:solidFill>
+                          <a:latin typeface="NanumSquare Neo Regular" pitchFamily="2" charset="-127"/>
+                          <a:ea typeface="NanumSquare Neo Regular" pitchFamily="2" charset="-127"/>
+                        </a:rPr>
+                        <a:t>보고</a:t>
+                      </a:r>
+                      <a:r>
+                        <a:rPr sz="950" b="0" dirty="0">
+                          <a:solidFill>
+                            <a:srgbClr val="222222"/>
+                          </a:solidFill>
+                          <a:latin typeface="NanumSquare Neo Regular" pitchFamily="2" charset="-127"/>
+                          <a:ea typeface="NanumSquare Neo Regular" pitchFamily="2" charset="-127"/>
+                        </a:rPr>
+                        <a:t>)</a:t>
                       </a:r>
                     </a:p>
                   </a:txBody>
-                  <a:tcPr marL="36576" marR="36576" marT="9144" marB="9144">
+                  <a:tcPr marL="36576" marR="36576" marT="9144" marB="9144" anchor="ctr">
                     <a:solidFill>
                       <a:srgbClr val="FFFFFF"/>
                     </a:solidFill>
@@ -4975,7 +5138,7 @@
                       </a:r>
                     </a:p>
                   </a:txBody>
-                  <a:tcPr marL="36576" marR="36576" marT="9144" marB="9144">
+                  <a:tcPr marL="36576" marR="36576" marT="9144" marB="9144" anchor="ctr">
                     <a:solidFill>
                       <a:srgbClr val="FFFFFF"/>
                     </a:solidFill>
@@ -4999,7 +5162,7 @@
                       </a:r>
                     </a:p>
                   </a:txBody>
-                  <a:tcPr marL="36576" marR="36576" marT="9144" marB="9144">
+                  <a:tcPr marL="36576" marR="36576" marT="9144" marB="9144" anchor="ctr">
                     <a:solidFill>
                       <a:srgbClr val="FFFFFF"/>
                     </a:solidFill>
@@ -5019,18 +5182,68 @@
                     <a:p>
                       <a:pPr algn="ctr"/>
                       <a:r>
-                        <a:rPr sz="950" b="0">
+                        <a:rPr sz="950" b="0" dirty="0" err="1">
                           <a:solidFill>
                             <a:srgbClr val="222222"/>
                           </a:solidFill>
                           <a:latin typeface="NanumSquare Neo Regular" pitchFamily="2" charset="-127"/>
                           <a:ea typeface="NanumSquare Neo Regular" pitchFamily="2" charset="-127"/>
                         </a:rPr>
-                        <a:t>DFM+XGBoost (기존 최고)</a:t>
+                        <a:t>DFM+XGBoost</a:t>
+                      </a:r>
+                      <a:r>
+                        <a:rPr sz="950" b="0" dirty="0">
+                          <a:solidFill>
+                            <a:srgbClr val="222222"/>
+                          </a:solidFill>
+                          <a:latin typeface="NanumSquare Neo Regular" pitchFamily="2" charset="-127"/>
+                          <a:ea typeface="NanumSquare Neo Regular" pitchFamily="2" charset="-127"/>
+                        </a:rPr>
+                        <a:t> (</a:t>
+                      </a:r>
+                      <a:r>
+                        <a:rPr sz="950" b="0" dirty="0" err="1">
+                          <a:solidFill>
+                            <a:srgbClr val="222222"/>
+                          </a:solidFill>
+                          <a:latin typeface="NanumSquare Neo Regular" pitchFamily="2" charset="-127"/>
+                          <a:ea typeface="NanumSquare Neo Regular" pitchFamily="2" charset="-127"/>
+                        </a:rPr>
+                        <a:t>기존</a:t>
+                      </a:r>
+                      <a:r>
+                        <a:rPr sz="950" b="0" dirty="0">
+                          <a:solidFill>
+                            <a:srgbClr val="222222"/>
+                          </a:solidFill>
+                          <a:latin typeface="NanumSquare Neo Regular" pitchFamily="2" charset="-127"/>
+                          <a:ea typeface="NanumSquare Neo Regular" pitchFamily="2" charset="-127"/>
+                        </a:rPr>
+                        <a:t> </a:t>
+                      </a:r>
+                      <a:r>
+                        <a:rPr sz="950" b="0" dirty="0" err="1">
+                          <a:solidFill>
+                            <a:srgbClr val="222222"/>
+                          </a:solidFill>
+                          <a:latin typeface="NanumSquare Neo Regular" pitchFamily="2" charset="-127"/>
+                          <a:ea typeface="NanumSquare Neo Regular" pitchFamily="2" charset="-127"/>
+                        </a:rPr>
+                        <a:t>최고</a:t>
+                      </a:r>
+                      <a:r>
+                        <a:rPr sz="950" b="0" dirty="0">
+                          <a:solidFill>
+                            <a:srgbClr val="222222"/>
+                          </a:solidFill>
+                          <a:latin typeface="NanumSquare Neo Regular" pitchFamily="2" charset="-127"/>
+                          <a:ea typeface="NanumSquare Neo Regular" pitchFamily="2" charset="-127"/>
+                        </a:rPr>
+                        <a:t>)</a:t>
                       </a:r>
                     </a:p>
                   </a:txBody>
-                  <a:tcPr marL="36576" marR="36576" marT="9144" marB="9144">
+                  <a:tcPr marL="36576" marR="36576" marT="9144" marB="9144" anchor="ctr">
                     <a:solidFill>
                       <a:srgbClr val="FFFFFF"/>
                     </a:solidFill>
@@ -5054,7 +5267,7 @@
                       </a:r>
                     </a:p>
                   </a:txBody>
-                  <a:tcPr marL="36576" marR="36576" marT="9144" marB="9144">
+                  <a:tcPr marL="36576" marR="36576" marT="9144" marB="9144" anchor="ctr">
                     <a:solidFill>
                       <a:srgbClr val="FFFFFF"/>
                     </a:solidFill>
@@ -5078,7 +5291,7 @@
                       </a:r>
                     </a:p>
                   </a:txBody>
-                  <a:tcPr marL="36576" marR="36576" marT="9144" marB="9144">
+                  <a:tcPr marL="36576" marR="36576" marT="9144" marB="9144" anchor="ctr">
                     <a:solidFill>
                       <a:srgbClr val="FFFFFF"/>
                     </a:solidFill>
